--- a/design/Jutyar_Pitch_Round2.pptx
+++ b/design/Jutyar_Pitch_Round2.pptx
@@ -721,7 +721,7 @@
           <a:lstStyle/>
           <a:p>
             <a:r>
-              <a:t>0:45 to 1:30. DEMO ON THE PHONE. This is running now, on a real server. I sign in with my phone number and an SMS code. This is my farm. I walked its corners and marked my crops. Every square is 10 metres, checked from space. I asked a question with a photo, and this is the answer, in Sorani. And this is Alwa, the marketplace: my tomatoes are on sale, and other farmers see them on their phones.</a:t>
+              <a:t>0:45 to 1:30. DEMO ON THE PHONE. This is running now, on a real server. I sign in with my phone number and an SMS code. This is my farm. I walked its corners and marked my crops. The app cuts it into 10 metre squares, the size of one satellite pixel. Here is my 10-day plan from the live forecast. I asked a question with a photo, and this is the answer, in Sorani. And this is Alwa, the marketplace: my tomatoes are on sale, and other farmers see them on their phones.</a:t>
             </a:r>
           </a:p>
         </p:txBody>
@@ -791,7 +791,7 @@
           <a:lstStyle/>
           <a:p>
             <a:r>
-              <a:t>1:30 to 2:05. INNOVATION. What is new? Our research found no farm AI in Kurdish anywhere. Jutyar checks every 10 metre square of a field from space and answers in Sorani, in one message of five parts, including what it cannot tell. And the farmer and the Ministry work on the same data.</a:t>
+              <a:t>1:30 to 2:05. INNOVATION. What is new? Our research found no farm AI in Kurdish anywhere. Jutyar maps a field in 10 metre squares, reads it from space, and answers in Sorani, in one message of five parts, including what it cannot tell. And the farmer and the Ministry work on the same data.</a:t>
             </a:r>
           </a:p>
         </p:txBody>
@@ -861,7 +861,7 @@
           <a:lstStyle/>
           <a:p>
             <a:r>
-              <a:t>2:05 to 2:35. AI is the translator. The satellite, the forecast and the field's history are only numbers. An AI model turns them, with the farmer's photo, into advice in Sorani, and it says when it is unsure. Every night another AI agent writes a brief on all 33 districts. And we built all of this with AI: Claude, Codex and Pencil.</a:t>
+              <a:t>2:05 to 2:35. AI is the translator. The satellite, the forecast and the field's history are only numbers. An AI model turns them, with the farmer's photo, into advice in Sorani, and it says when it is unsure. Every night another AI agent writes the daily brief for the region. And we built all of this with AI: Claude, Codex and Pencil.</a:t>
             </a:r>
           </a:p>
         </p:txBody>
@@ -1141,7 +1141,7 @@
           <a:lstStyle/>
           <a:p>
             <a:r>
-              <a:t>4:05 to 4:40. TRUST. Is it safe? We keep very little: a phone number, no name, no password. A farmer can delete his account and his farms from Settings. Staff see only what their role allows. And the advice is careful: it never gives a chemical dose, it says when it is unsure, and it sends the farmer to an officer.</a:t>
+              <a:t>4:05 to 4:40. TRUST. Is it safe? To sign in, a farmer gives only a phone number, no password. He can delete his account and his farms from Settings. Staff see only what their role allows. And the advice is careful: it never gives a chemical dose, it says when it is unsure, and it sends the farmer to an officer.</a:t>
             </a:r>
           </a:p>
         </p:txBody>

--- a/design/Jutyar_Pitch_Round2.pptx
+++ b/design/Jutyar_Pitch_Round2.pptx
@@ -651,7 +651,7 @@
           <a:lstStyle/>
           <a:p>
             <a:r>
-              <a:t>0:10 to 0:45. PUBLIC VALUE. Kurdistan has about 50,000 wheat farmers and about 215 advisers: one for every 230 farmers. In the 2025 drought the region lost about 800,000 tonnes of wheat. That winter Slemani got 57 percent of its normal rain, and most farmers learned it from their own fields. Jutyar gives every farmer advice for his own field, every week, in his own language, and gives the Ministry the same picture for the whole region.</a:t>
+              <a:t>0:10 to 0:45. PUBLIC VALUE. Kurdistan has tens of thousands of farmers, but access to extension advice is limited. In a 2024 study, the region's own extension staff described the service as weak. In the 2025 drought the region lost about 800,000 tonnes of wheat. That winter Slemani got 57 percent of its normal rain, and most farmers learned it from their own fields. Jutyar gives every farmer advice for his own field, every week, in his own language, and gives the Ministry the same picture for the whole region.</a:t>
             </a:r>
           </a:p>
         </p:txBody>
@@ -4233,7 +4233,7 @@
       <p:grpSpPr/>
       <p:pic>
         <p:nvPicPr>
-          <p:cNvPr id="2" name="Public value: 50,000 farmers, 215 advisers" descr="Public value: 50,000 farmers, 215 advisers"/>
+          <p:cNvPr id="2" name="Public value: thousands of farmers, too little advice" descr="Public value: thousands of farmers, too little advice"/>
           <p:cNvPicPr>
             <a:picLocks noChangeAspect="1"/>
           </p:cNvPicPr>
